--- a/presentations/10-c-structs-and-tiles/10-c-structs-and-tiles-lab.pptx
+++ b/presentations/10-c-structs-and-tiles/10-c-structs-and-tiles-lab.pptx
@@ -132,7 +132,7 @@
   <p:extLst>
     <p:ext uri="{521415D9-36F7-43E2-AB2F-B90AF26B5E84}">
       <p14:sectionLst xmlns:p14="http://schemas.microsoft.com/office/powerpoint/2010/main">
-        <p14:section name="Opening" id="{16510e9f-c742-cdac-f267-09910ff895ab}">
+        <p14:section name="Opening" id="{2cc863fe-f295-a940-fbc6-c8b3762d9940}">
           <p14:sldIdLst>
             <p14:sldId id="256"/>
             <p14:sldId id="257"/>
@@ -140,7 +140,7 @@
             <p14:sldId id="259"/>
           </p14:sldIdLst>
         </p14:section>
-        <p14:section name="Part A: bricks" id="{657e63ca-33c1-cc7b-e5bf-60978acded05}">
+        <p14:section name="Part A: bricks" id="{2d5800f6-e8e5-86c5-fa11-3df7c2e78e9f}">
           <p14:sldIdLst>
             <p14:sldId id="260"/>
             <p14:sldId id="261"/>
@@ -153,7 +153,7 @@
             <p14:sldId id="268"/>
           </p14:sldIdLst>
         </p14:section>
-        <p14:section name="Part B: a world" id="{24b140ae-c596-9d08-eb89-758909c4704c}">
+        <p14:section name="Part B: a world" id="{a3b9161f-23da-1e10-c43f-b6a7bd468ae0}">
           <p14:sldIdLst>
             <p14:sldId id="269"/>
             <p14:sldId id="270"/>
@@ -169,7 +169,7 @@
             <p14:sldId id="280"/>
           </p14:sldIdLst>
         </p14:section>
-        <p14:section name="Closing" id="{b5f4baef-f9bb-d6de-cf4d-8bfa5149e1c6}">
+        <p14:section name="Closing" id="{02d39152-179f-384f-d55b-bc7431225322}">
           <p14:sldIdLst>
             <p14:sldId id="281"/>
           </p14:sldIdLst>
@@ -6440,7 +6440,7 @@
               <a:buNone/>
             </a:pPr>
             <a:r>
-              <a:rPr lang="en-US" sz="1150" dirty="0">
+              <a:rPr lang="en-US" sz="1350" dirty="0">
                 <a:solidFill>
                   <a:srgbClr val="E6EDF2"/>
                 </a:solidFill>
@@ -6450,14 +6450,14 @@
               </a:rPr>
               <a:t>static void fill_world(void) {</a:t>
             </a:r>
-            <a:endParaRPr lang="en-US" sz="1150" dirty="0"/>
+            <a:endParaRPr lang="en-US" sz="1350" dirty="0"/>
           </a:p>
           <a:p>
             <a:pPr indent="0" marL="0">
               <a:buNone/>
             </a:pPr>
             <a:r>
-              <a:rPr lang="en-US" sz="1150" dirty="0">
+              <a:rPr lang="en-US" sz="1350" dirty="0">
                 <a:solidFill>
                   <a:srgbClr val="E6EDF2"/>
                 </a:solidFill>
@@ -6467,14 +6467,14 @@
               </a:rPr>
               <a:t>    prg32_playfield_clear(1, 0);</a:t>
             </a:r>
-            <a:endParaRPr lang="en-US" sz="1150" dirty="0"/>
+            <a:endParaRPr lang="en-US" sz="1350" dirty="0"/>
           </a:p>
           <a:p>
             <a:pPr indent="0" marL="0">
               <a:buNone/>
             </a:pPr>
             <a:r>
-              <a:rPr lang="en-US" sz="1150" dirty="0">
+              <a:rPr lang="en-US" sz="1350" dirty="0">
                 <a:solidFill>
                   <a:srgbClr val="E6EDF2"/>
                 </a:solidFill>
@@ -6482,16 +6482,16 @@
                 <a:ea typeface="Courier New" pitchFamily="34" charset="-122"/>
                 <a:cs typeface="Courier New" pitchFamily="34" charset="-120"/>
               </a:rPr>
-              <a:t>    prg32_tile_define(2, solid, PRG32_COLOR_GREEN, PRG32_COLOR_BLACK);</a:t>
-            </a:r>
-            <a:endParaRPr lang="en-US" sz="1150" dirty="0"/>
+              <a:t>    prg32_tile_define(2, solid, PRG32_COLOR_GREEN,</a:t>
+            </a:r>
+            <a:endParaRPr lang="en-US" sz="1350" dirty="0"/>
           </a:p>
           <a:p>
             <a:pPr indent="0" marL="0">
               <a:buNone/>
             </a:pPr>
             <a:r>
-              <a:rPr lang="en-US" sz="1150" dirty="0">
+              <a:rPr lang="en-US" sz="1350" dirty="0">
                 <a:solidFill>
                   <a:srgbClr val="E6EDF2"/>
                 </a:solidFill>
@@ -6499,102 +6499,119 @@
                 <a:ea typeface="Courier New" pitchFamily="34" charset="-122"/>
                 <a:cs typeface="Courier New" pitchFamily="34" charset="-120"/>
               </a:rPr>
-              <a:t>    put_run(1, 0, 63, 22, 2);  </a:t>
-            </a:r>
+              <a:t>        PRG32_COLOR_BLACK);</a:t>
+            </a:r>
+            <a:endParaRPr lang="en-US" sz="1350" dirty="0"/>
+          </a:p>
+          <a:p>
             <a:pPr indent="0" marL="0">
               <a:buNone/>
             </a:pPr>
             <a:r>
-              <a:rPr lang="en-US" sz="1150" dirty="0">
-                <a:solidFill>
-                  <a:srgbClr val="8FB3A0"/>
+              <a:rPr lang="en-US" sz="1350" dirty="0">
+                <a:solidFill>
+                  <a:srgbClr val="E6EDF2"/>
                 </a:solidFill>
                 <a:latin typeface="Courier New" pitchFamily="34" charset="0"/>
                 <a:ea typeface="Courier New" pitchFamily="34" charset="-122"/>
                 <a:cs typeface="Courier New" pitchFamily="34" charset="-120"/>
               </a:rPr>
-              <a:t>/* the ground, whole width */</a:t>
-            </a:r>
-            <a:endParaRPr lang="en-US" sz="1150" dirty="0"/>
-          </a:p>
-          <a:p>
+              <a:t>    put_run(1, 0, 63, 22, 2);  </a:t>
+            </a:r>
             <a:pPr indent="0" marL="0">
               <a:buNone/>
             </a:pPr>
             <a:r>
-              <a:rPr lang="en-US" sz="1150" dirty="0">
-                <a:solidFill>
-                  <a:srgbClr val="E6EDF2"/>
+              <a:rPr lang="en-US" sz="1350" dirty="0">
+                <a:solidFill>
+                  <a:srgbClr val="8FB3A0"/>
                 </a:solidFill>
                 <a:latin typeface="Courier New" pitchFamily="34" charset="0"/>
                 <a:ea typeface="Courier New" pitchFamily="34" charset="-122"/>
                 <a:cs typeface="Courier New" pitchFamily="34" charset="-120"/>
               </a:rPr>
-              <a:t>    put_run(1, 10, 19, 17, 2); </a:t>
-            </a:r>
+              <a:t>/* the ground, whole width */</a:t>
+            </a:r>
+            <a:endParaRPr lang="en-US" sz="1350" dirty="0"/>
+          </a:p>
+          <a:p>
             <a:pPr indent="0" marL="0">
               <a:buNone/>
             </a:pPr>
             <a:r>
-              <a:rPr lang="en-US" sz="1150" dirty="0">
-                <a:solidFill>
-                  <a:srgbClr val="8FB3A0"/>
+              <a:rPr lang="en-US" sz="1350" dirty="0">
+                <a:solidFill>
+                  <a:srgbClr val="E6EDF2"/>
                 </a:solidFill>
                 <a:latin typeface="Courier New" pitchFamily="34" charset="0"/>
                 <a:ea typeface="Courier New" pitchFamily="34" charset="-122"/>
                 <a:cs typeface="Courier New" pitchFamily="34" charset="-120"/>
               </a:rPr>
-              <a:t>/* a platform */</a:t>
-            </a:r>
-            <a:endParaRPr lang="en-US" sz="1150" dirty="0"/>
-          </a:p>
-          <a:p>
+              <a:t>    put_run(1, 10, 19, 17, 2); </a:t>
+            </a:r>
             <a:pPr indent="0" marL="0">
               <a:buNone/>
             </a:pPr>
             <a:r>
-              <a:rPr lang="en-US" sz="1150" dirty="0">
-                <a:solidFill>
-                  <a:srgbClr val="E6EDF2"/>
+              <a:rPr lang="en-US" sz="1350" dirty="0">
+                <a:solidFill>
+                  <a:srgbClr val="8FB3A0"/>
                 </a:solidFill>
                 <a:latin typeface="Courier New" pitchFamily="34" charset="0"/>
                 <a:ea typeface="Courier New" pitchFamily="34" charset="-122"/>
                 <a:cs typeface="Courier New" pitchFamily="34" charset="-120"/>
               </a:rPr>
-              <a:t>    put_run(1, 25, 32, 12, 2); </a:t>
-            </a:r>
+              <a:t>/* a platform */</a:t>
+            </a:r>
+            <a:endParaRPr lang="en-US" sz="1350" dirty="0"/>
+          </a:p>
+          <a:p>
             <a:pPr indent="0" marL="0">
               <a:buNone/>
             </a:pPr>
             <a:r>
-              <a:rPr lang="en-US" sz="1150" dirty="0">
-                <a:solidFill>
-                  <a:srgbClr val="8FB3A0"/>
+              <a:rPr lang="en-US" sz="1350" dirty="0">
+                <a:solidFill>
+                  <a:srgbClr val="E6EDF2"/>
                 </a:solidFill>
                 <a:latin typeface="Courier New" pitchFamily="34" charset="0"/>
                 <a:ea typeface="Courier New" pitchFamily="34" charset="-122"/>
                 <a:cs typeface="Courier New" pitchFamily="34" charset="-120"/>
               </a:rPr>
-              <a:t>/* a higher one */</a:t>
-            </a:r>
-            <a:endParaRPr lang="en-US" sz="1150" dirty="0"/>
-          </a:p>
-          <a:p>
+              <a:t>    put_run(1, 25, 32, 12, 2); </a:t>
+            </a:r>
             <a:pPr indent="0" marL="0">
               <a:buNone/>
             </a:pPr>
             <a:r>
-              <a:rPr lang="en-US" sz="1150" dirty="0">
-                <a:solidFill>
-                  <a:srgbClr val="E6EDF2"/>
+              <a:rPr lang="en-US" sz="1350" dirty="0">
+                <a:solidFill>
+                  <a:srgbClr val="8FB3A0"/>
                 </a:solidFill>
                 <a:latin typeface="Courier New" pitchFamily="34" charset="0"/>
                 <a:ea typeface="Courier New" pitchFamily="34" charset="-122"/>
                 <a:cs typeface="Courier New" pitchFamily="34" charset="-120"/>
               </a:rPr>
+              <a:t>/* a higher one */</a:t>
+            </a:r>
+            <a:endParaRPr lang="en-US" sz="1350" dirty="0"/>
+          </a:p>
+          <a:p>
+            <a:pPr indent="0" marL="0">
+              <a:buNone/>
+            </a:pPr>
+            <a:r>
+              <a:rPr lang="en-US" sz="1350" dirty="0">
+                <a:solidFill>
+                  <a:srgbClr val="E6EDF2"/>
+                </a:solidFill>
+                <a:latin typeface="Courier New" pitchFamily="34" charset="0"/>
+                <a:ea typeface="Courier New" pitchFamily="34" charset="-122"/>
+                <a:cs typeface="Courier New" pitchFamily="34" charset="-120"/>
+              </a:rPr>
               <a:t>}</a:t>
             </a:r>
-            <a:endParaRPr lang="en-US" sz="1150" dirty="0"/>
+            <a:endParaRPr lang="en-US" sz="1350" dirty="0"/>
           </a:p>
         </p:txBody>
       </p:sp>
@@ -8570,7 +8587,7 @@
               <a:buNone/>
             </a:pPr>
             <a:r>
-              <a:rPr lang="en-US" sz="1050" dirty="0">
+              <a:rPr lang="en-US" sz="1250" dirty="0">
                 <a:solidFill>
                   <a:srgbClr val="E6EDF2"/>
                 </a:solidFill>
@@ -8580,14 +8597,14 @@
               </a:rPr>
               <a:t>void plat_update(void) {</a:t>
             </a:r>
-            <a:endParaRPr lang="en-US" sz="1050" dirty="0"/>
+            <a:endParaRPr lang="en-US" sz="1250" dirty="0"/>
           </a:p>
           <a:p>
             <a:pPr indent="0" marL="0">
               <a:buNone/>
             </a:pPr>
             <a:r>
-              <a:rPr lang="en-US" sz="1050" dirty="0">
+              <a:rPr lang="en-US" sz="1250" dirty="0">
                 <a:solidFill>
                   <a:srgbClr val="E6EDF2"/>
                 </a:solidFill>
@@ -8597,14 +8614,14 @@
               </a:rPr>
               <a:t>    uint32_t input = prg32_input_read();</a:t>
             </a:r>
-            <a:endParaRPr lang="en-US" sz="1050" dirty="0"/>
+            <a:endParaRPr lang="en-US" sz="1250" dirty="0"/>
           </a:p>
           <a:p>
             <a:pPr indent="0" marL="0">
               <a:buNone/>
             </a:pPr>
             <a:r>
-              <a:rPr lang="en-US" sz="1050" dirty="0">
+              <a:rPr lang="en-US" sz="1250" dirty="0">
                 <a:solidFill>
                   <a:srgbClr val="E6EDF2"/>
                 </a:solidFill>
@@ -8618,7 +8635,7 @@
               <a:buNone/>
             </a:pPr>
             <a:r>
-              <a:rPr lang="en-US" sz="1050" dirty="0">
+              <a:rPr lang="en-US" sz="1250" dirty="0">
                 <a:solidFill>
                   <a:srgbClr val="8FB3A0"/>
                 </a:solidFill>
@@ -8628,14 +8645,14 @@
               </a:rPr>
               <a:t>/* move_speed, jump_speed, gravity, max_fall */</a:t>
             </a:r>
-            <a:endParaRPr lang="en-US" sz="1050" dirty="0"/>
+            <a:endParaRPr lang="en-US" sz="1250" dirty="0"/>
           </a:p>
           <a:p>
             <a:pPr indent="0" marL="0">
               <a:buNone/>
             </a:pPr>
             <a:r>
-              <a:rPr lang="en-US" sz="1050" dirty="0">
+              <a:rPr lang="en-US" sz="1250" dirty="0">
                 <a:solidFill>
                   <a:srgbClr val="E6EDF2"/>
                 </a:solidFill>
@@ -8643,16 +8660,16 @@
                 <a:ea typeface="Courier New" pitchFamily="34" charset="-122"/>
                 <a:cs typeface="Courier New" pitchFamily="34" charset="-120"/>
               </a:rPr>
-              <a:t>    uint16_t state = prg32_platform_actor_step(&amp;player, input, 2, -7, 1, 5);</a:t>
-            </a:r>
-            <a:endParaRPr lang="en-US" sz="1050" dirty="0"/>
+              <a:t>    uint16_t state = prg32_platform_actor_step(&amp;player, input, 2,</a:t>
+            </a:r>
+            <a:endParaRPr lang="en-US" sz="1250" dirty="0"/>
           </a:p>
           <a:p>
             <a:pPr indent="0" marL="0">
               <a:buNone/>
             </a:pPr>
             <a:r>
-              <a:rPr lang="en-US" sz="1050" dirty="0">
+              <a:rPr lang="en-US" sz="1250" dirty="0">
                 <a:solidFill>
                   <a:srgbClr val="E6EDF2"/>
                 </a:solidFill>
@@ -8660,16 +8677,16 @@
                 <a:ea typeface="Courier New" pitchFamily="34" charset="-122"/>
                 <a:cs typeface="Courier New" pitchFamily="34" charset="-120"/>
               </a:rPr>
-              <a:t>    (void)state;</a:t>
-            </a:r>
-            <a:endParaRPr lang="en-US" sz="1050" dirty="0"/>
+              <a:t>        -7, 1, 5);</a:t>
+            </a:r>
+            <a:endParaRPr lang="en-US" sz="1250" dirty="0"/>
           </a:p>
           <a:p>
             <a:pPr indent="0" marL="0">
               <a:buNone/>
             </a:pPr>
             <a:r>
-              <a:rPr lang="en-US" sz="1050" dirty="0">
+              <a:rPr lang="en-US" sz="1250" dirty="0">
                 <a:solidFill>
                   <a:srgbClr val="E6EDF2"/>
                 </a:solidFill>
@@ -8677,16 +8694,16 @@
                 <a:ea typeface="Courier New" pitchFamily="34" charset="-122"/>
                 <a:cs typeface="Courier New" pitchFamily="34" charset="-120"/>
               </a:rPr>
-              <a:t>    prg32_platform_camera_follow(&amp;player, 64, 48);</a:t>
-            </a:r>
-            <a:endParaRPr lang="en-US" sz="1050" dirty="0"/>
+              <a:t>    (void)state;</a:t>
+            </a:r>
+            <a:endParaRPr lang="en-US" sz="1250" dirty="0"/>
           </a:p>
           <a:p>
             <a:pPr indent="0" marL="0">
               <a:buNone/>
             </a:pPr>
             <a:r>
-              <a:rPr lang="en-US" sz="1050" dirty="0">
+              <a:rPr lang="en-US" sz="1250" dirty="0">
                 <a:solidFill>
                   <a:srgbClr val="E6EDF2"/>
                 </a:solidFill>
@@ -8694,9 +8711,26 @@
                 <a:ea typeface="Courier New" pitchFamily="34" charset="-122"/>
                 <a:cs typeface="Courier New" pitchFamily="34" charset="-120"/>
               </a:rPr>
+              <a:t>    prg32_platform_camera_follow(&amp;player, 64, 48);</a:t>
+            </a:r>
+            <a:endParaRPr lang="en-US" sz="1250" dirty="0"/>
+          </a:p>
+          <a:p>
+            <a:pPr indent="0" marL="0">
+              <a:buNone/>
+            </a:pPr>
+            <a:r>
+              <a:rPr lang="en-US" sz="1250" dirty="0">
+                <a:solidFill>
+                  <a:srgbClr val="E6EDF2"/>
+                </a:solidFill>
+                <a:latin typeface="Courier New" pitchFamily="34" charset="0"/>
+                <a:ea typeface="Courier New" pitchFamily="34" charset="-122"/>
+                <a:cs typeface="Courier New" pitchFamily="34" charset="-120"/>
+              </a:rPr>
               <a:t>}</a:t>
             </a:r>
-            <a:endParaRPr lang="en-US" sz="1050" dirty="0"/>
+            <a:endParaRPr lang="en-US" sz="1250" dirty="0"/>
           </a:p>
         </p:txBody>
       </p:sp>
@@ -10217,7 +10251,7 @@
               <a:buNone/>
             </a:pPr>
             <a:r>
-              <a:rPr lang="en-US" sz="1022" dirty="0">
+              <a:rPr lang="en-US" sz="1398" dirty="0">
                 <a:solidFill>
                   <a:srgbClr val="5B6B78"/>
                 </a:solidFill>
@@ -10227,7 +10261,7 @@
               </a:rPr>
               <a:t>+0</a:t>
             </a:r>
-            <a:endParaRPr lang="en-US" sz="1022" dirty="0"/>
+            <a:endParaRPr lang="en-US" sz="1398" dirty="0"/>
           </a:p>
         </p:txBody>
       </p:sp>
@@ -10262,7 +10296,7 @@
               <a:buNone/>
             </a:pPr>
             <a:r>
-              <a:rPr lang="en-US" sz="1222" b="1" dirty="0">
+              <a:rPr lang="en-US" sz="1598" b="1" dirty="0">
                 <a:solidFill>
                   <a:srgbClr val="FFFFFF"/>
                 </a:solidFill>
@@ -10272,7 +10306,7 @@
               </a:rPr>
               <a:t>x</a:t>
             </a:r>
-            <a:endParaRPr lang="en-US" sz="1222" dirty="0"/>
+            <a:endParaRPr lang="en-US" sz="1598" dirty="0"/>
           </a:p>
         </p:txBody>
       </p:sp>
@@ -10301,7 +10335,7 @@
               <a:buNone/>
             </a:pPr>
             <a:r>
-              <a:rPr lang="en-US" sz="1022" dirty="0">
+              <a:rPr lang="en-US" sz="1398" dirty="0">
                 <a:solidFill>
                   <a:srgbClr val="5B6B78"/>
                 </a:solidFill>
@@ -10311,7 +10345,7 @@
               </a:rPr>
               <a:t>4 bytes</a:t>
             </a:r>
-            <a:endParaRPr lang="en-US" sz="1022" dirty="0"/>
+            <a:endParaRPr lang="en-US" sz="1398" dirty="0"/>
           </a:p>
         </p:txBody>
       </p:sp>
@@ -10340,7 +10374,7 @@
               <a:buNone/>
             </a:pPr>
             <a:r>
-              <a:rPr lang="en-US" sz="1222" dirty="0">
+              <a:rPr lang="en-US" sz="1598" dirty="0">
                 <a:solidFill>
                   <a:srgbClr val="1B2530"/>
                 </a:solidFill>
@@ -10350,7 +10384,7 @@
               </a:rPr>
               <a:t>int: position</a:t>
             </a:r>
-            <a:endParaRPr lang="en-US" sz="1222" dirty="0"/>
+            <a:endParaRPr lang="en-US" sz="1598" dirty="0"/>
           </a:p>
         </p:txBody>
       </p:sp>
@@ -10379,7 +10413,7 @@
               <a:buNone/>
             </a:pPr>
             <a:r>
-              <a:rPr lang="en-US" sz="1022" dirty="0">
+              <a:rPr lang="en-US" sz="1398" dirty="0">
                 <a:solidFill>
                   <a:srgbClr val="5B6B78"/>
                 </a:solidFill>
@@ -10389,7 +10423,7 @@
               </a:rPr>
               <a:t>+4</a:t>
             </a:r>
-            <a:endParaRPr lang="en-US" sz="1022" dirty="0"/>
+            <a:endParaRPr lang="en-US" sz="1398" dirty="0"/>
           </a:p>
         </p:txBody>
       </p:sp>
@@ -10424,7 +10458,7 @@
               <a:buNone/>
             </a:pPr>
             <a:r>
-              <a:rPr lang="en-US" sz="1222" b="1" dirty="0">
+              <a:rPr lang="en-US" sz="1598" b="1" dirty="0">
                 <a:solidFill>
                   <a:srgbClr val="FFFFFF"/>
                 </a:solidFill>
@@ -10434,7 +10468,7 @@
               </a:rPr>
               <a:t>y</a:t>
             </a:r>
-            <a:endParaRPr lang="en-US" sz="1222" dirty="0"/>
+            <a:endParaRPr lang="en-US" sz="1598" dirty="0"/>
           </a:p>
         </p:txBody>
       </p:sp>
@@ -10463,7 +10497,7 @@
               <a:buNone/>
             </a:pPr>
             <a:r>
-              <a:rPr lang="en-US" sz="1022" dirty="0">
+              <a:rPr lang="en-US" sz="1398" dirty="0">
                 <a:solidFill>
                   <a:srgbClr val="5B6B78"/>
                 </a:solidFill>
@@ -10473,7 +10507,7 @@
               </a:rPr>
               <a:t>4 bytes</a:t>
             </a:r>
-            <a:endParaRPr lang="en-US" sz="1022" dirty="0"/>
+            <a:endParaRPr lang="en-US" sz="1398" dirty="0"/>
           </a:p>
         </p:txBody>
       </p:sp>
@@ -10502,7 +10536,7 @@
               <a:buNone/>
             </a:pPr>
             <a:r>
-              <a:rPr lang="en-US" sz="1222" dirty="0">
+              <a:rPr lang="en-US" sz="1598" dirty="0">
                 <a:solidFill>
                   <a:srgbClr val="1B2530"/>
                 </a:solidFill>
@@ -10512,7 +10546,7 @@
               </a:rPr>
               <a:t>int</a:t>
             </a:r>
-            <a:endParaRPr lang="en-US" sz="1222" dirty="0"/>
+            <a:endParaRPr lang="en-US" sz="1598" dirty="0"/>
           </a:p>
         </p:txBody>
       </p:sp>
@@ -10541,7 +10575,7 @@
               <a:buNone/>
             </a:pPr>
             <a:r>
-              <a:rPr lang="en-US" sz="1022" dirty="0">
+              <a:rPr lang="en-US" sz="1398" dirty="0">
                 <a:solidFill>
                   <a:srgbClr val="5B6B78"/>
                 </a:solidFill>
@@ -10551,7 +10585,7 @@
               </a:rPr>
               <a:t>+8</a:t>
             </a:r>
-            <a:endParaRPr lang="en-US" sz="1022" dirty="0"/>
+            <a:endParaRPr lang="en-US" sz="1398" dirty="0"/>
           </a:p>
         </p:txBody>
       </p:sp>
@@ -10586,7 +10620,7 @@
               <a:buNone/>
             </a:pPr>
             <a:r>
-              <a:rPr lang="en-US" sz="1222" b="1" dirty="0">
+              <a:rPr lang="en-US" sz="1598" b="1" dirty="0">
                 <a:solidFill>
                   <a:srgbClr val="FFFFFF"/>
                 </a:solidFill>
@@ -10596,7 +10630,7 @@
               </a:rPr>
               <a:t>vx</a:t>
             </a:r>
-            <a:endParaRPr lang="en-US" sz="1222" dirty="0"/>
+            <a:endParaRPr lang="en-US" sz="1598" dirty="0"/>
           </a:p>
         </p:txBody>
       </p:sp>
@@ -10625,7 +10659,7 @@
               <a:buNone/>
             </a:pPr>
             <a:r>
-              <a:rPr lang="en-US" sz="1022" dirty="0">
+              <a:rPr lang="en-US" sz="1398" dirty="0">
                 <a:solidFill>
                   <a:srgbClr val="5B6B78"/>
                 </a:solidFill>
@@ -10635,7 +10669,7 @@
               </a:rPr>
               <a:t>4 bytes</a:t>
             </a:r>
-            <a:endParaRPr lang="en-US" sz="1022" dirty="0"/>
+            <a:endParaRPr lang="en-US" sz="1398" dirty="0"/>
           </a:p>
         </p:txBody>
       </p:sp>
@@ -10664,7 +10698,7 @@
               <a:buNone/>
             </a:pPr>
             <a:r>
-              <a:rPr lang="en-US" sz="1222" dirty="0">
+              <a:rPr lang="en-US" sz="1598" dirty="0">
                 <a:solidFill>
                   <a:srgbClr val="1B2530"/>
                 </a:solidFill>
@@ -10674,7 +10708,7 @@
               </a:rPr>
               <a:t>int: velocity</a:t>
             </a:r>
-            <a:endParaRPr lang="en-US" sz="1222" dirty="0"/>
+            <a:endParaRPr lang="en-US" sz="1598" dirty="0"/>
           </a:p>
         </p:txBody>
       </p:sp>
@@ -10703,7 +10737,7 @@
               <a:buNone/>
             </a:pPr>
             <a:r>
-              <a:rPr lang="en-US" sz="1022" dirty="0">
+              <a:rPr lang="en-US" sz="1398" dirty="0">
                 <a:solidFill>
                   <a:srgbClr val="5B6B78"/>
                 </a:solidFill>
@@ -10713,7 +10747,7 @@
               </a:rPr>
               <a:t>+12</a:t>
             </a:r>
-            <a:endParaRPr lang="en-US" sz="1022" dirty="0"/>
+            <a:endParaRPr lang="en-US" sz="1398" dirty="0"/>
           </a:p>
         </p:txBody>
       </p:sp>
@@ -10748,7 +10782,7 @@
               <a:buNone/>
             </a:pPr>
             <a:r>
-              <a:rPr lang="en-US" sz="1222" b="1" dirty="0">
+              <a:rPr lang="en-US" sz="1598" b="1" dirty="0">
                 <a:solidFill>
                   <a:srgbClr val="FFFFFF"/>
                 </a:solidFill>
@@ -10758,7 +10792,7 @@
               </a:rPr>
               <a:t>vy</a:t>
             </a:r>
-            <a:endParaRPr lang="en-US" sz="1222" dirty="0"/>
+            <a:endParaRPr lang="en-US" sz="1598" dirty="0"/>
           </a:p>
         </p:txBody>
       </p:sp>
@@ -10787,7 +10821,7 @@
               <a:buNone/>
             </a:pPr>
             <a:r>
-              <a:rPr lang="en-US" sz="1022" dirty="0">
+              <a:rPr lang="en-US" sz="1398" dirty="0">
                 <a:solidFill>
                   <a:srgbClr val="5B6B78"/>
                 </a:solidFill>
@@ -10797,7 +10831,7 @@
               </a:rPr>
               <a:t>4 bytes</a:t>
             </a:r>
-            <a:endParaRPr lang="en-US" sz="1022" dirty="0"/>
+            <a:endParaRPr lang="en-US" sz="1398" dirty="0"/>
           </a:p>
         </p:txBody>
       </p:sp>
@@ -10826,7 +10860,7 @@
               <a:buNone/>
             </a:pPr>
             <a:r>
-              <a:rPr lang="en-US" sz="1222" dirty="0">
+              <a:rPr lang="en-US" sz="1598" dirty="0">
                 <a:solidFill>
                   <a:srgbClr val="1B2530"/>
                 </a:solidFill>
@@ -10836,7 +10870,7 @@
               </a:rPr>
               <a:t>int</a:t>
             </a:r>
-            <a:endParaRPr lang="en-US" sz="1222" dirty="0"/>
+            <a:endParaRPr lang="en-US" sz="1598" dirty="0"/>
           </a:p>
         </p:txBody>
       </p:sp>
@@ -10865,7 +10899,7 @@
               <a:buNone/>
             </a:pPr>
             <a:r>
-              <a:rPr lang="en-US" sz="1022" dirty="0">
+              <a:rPr lang="en-US" sz="1398" dirty="0">
                 <a:solidFill>
                   <a:srgbClr val="5B6B78"/>
                 </a:solidFill>
@@ -10875,7 +10909,7 @@
               </a:rPr>
               <a:t>+16</a:t>
             </a:r>
-            <a:endParaRPr lang="en-US" sz="1022" dirty="0"/>
+            <a:endParaRPr lang="en-US" sz="1398" dirty="0"/>
           </a:p>
         </p:txBody>
       </p:sp>
@@ -10910,7 +10944,7 @@
               <a:buNone/>
             </a:pPr>
             <a:r>
-              <a:rPr lang="en-US" sz="1222" b="1" dirty="0">
+              <a:rPr lang="en-US" sz="1598" b="1" dirty="0">
                 <a:solidFill>
                   <a:srgbClr val="FFFFFF"/>
                 </a:solidFill>
@@ -10920,7 +10954,7 @@
               </a:rPr>
               <a:t>w</a:t>
             </a:r>
-            <a:endParaRPr lang="en-US" sz="1222" dirty="0"/>
+            <a:endParaRPr lang="en-US" sz="1598" dirty="0"/>
           </a:p>
         </p:txBody>
       </p:sp>
@@ -10949,7 +10983,7 @@
               <a:buNone/>
             </a:pPr>
             <a:r>
-              <a:rPr lang="en-US" sz="1022" dirty="0">
+              <a:rPr lang="en-US" sz="1398" dirty="0">
                 <a:solidFill>
                   <a:srgbClr val="5B6B78"/>
                 </a:solidFill>
@@ -10959,7 +10993,7 @@
               </a:rPr>
               <a:t>2 bytes</a:t>
             </a:r>
-            <a:endParaRPr lang="en-US" sz="1022" dirty="0"/>
+            <a:endParaRPr lang="en-US" sz="1398" dirty="0"/>
           </a:p>
         </p:txBody>
       </p:sp>
@@ -10988,7 +11022,7 @@
               <a:buNone/>
             </a:pPr>
             <a:r>
-              <a:rPr lang="en-US" sz="1222" dirty="0">
+              <a:rPr lang="en-US" sz="1598" dirty="0">
                 <a:solidFill>
                   <a:srgbClr val="1B2530"/>
                 </a:solidFill>
@@ -10998,7 +11032,7 @@
               </a:rPr>
               <a:t>uint16_t: size</a:t>
             </a:r>
-            <a:endParaRPr lang="en-US" sz="1222" dirty="0"/>
+            <a:endParaRPr lang="en-US" sz="1598" dirty="0"/>
           </a:p>
         </p:txBody>
       </p:sp>
@@ -11027,7 +11061,7 @@
               <a:buNone/>
             </a:pPr>
             <a:r>
-              <a:rPr lang="en-US" sz="1022" dirty="0">
+              <a:rPr lang="en-US" sz="1398" dirty="0">
                 <a:solidFill>
                   <a:srgbClr val="5B6B78"/>
                 </a:solidFill>
@@ -11037,7 +11071,7 @@
               </a:rPr>
               <a:t>+18</a:t>
             </a:r>
-            <a:endParaRPr lang="en-US" sz="1022" dirty="0"/>
+            <a:endParaRPr lang="en-US" sz="1398" dirty="0"/>
           </a:p>
         </p:txBody>
       </p:sp>
@@ -11072,7 +11106,7 @@
               <a:buNone/>
             </a:pPr>
             <a:r>
-              <a:rPr lang="en-US" sz="1222" b="1" dirty="0">
+              <a:rPr lang="en-US" sz="1598" b="1" dirty="0">
                 <a:solidFill>
                   <a:srgbClr val="FFFFFF"/>
                 </a:solidFill>
@@ -11082,7 +11116,7 @@
               </a:rPr>
               <a:t>h</a:t>
             </a:r>
-            <a:endParaRPr lang="en-US" sz="1222" dirty="0"/>
+            <a:endParaRPr lang="en-US" sz="1598" dirty="0"/>
           </a:p>
         </p:txBody>
       </p:sp>
@@ -11111,7 +11145,7 @@
               <a:buNone/>
             </a:pPr>
             <a:r>
-              <a:rPr lang="en-US" sz="1022" dirty="0">
+              <a:rPr lang="en-US" sz="1398" dirty="0">
                 <a:solidFill>
                   <a:srgbClr val="5B6B78"/>
                 </a:solidFill>
@@ -11121,7 +11155,7 @@
               </a:rPr>
               <a:t>2 bytes</a:t>
             </a:r>
-            <a:endParaRPr lang="en-US" sz="1022" dirty="0"/>
+            <a:endParaRPr lang="en-US" sz="1398" dirty="0"/>
           </a:p>
         </p:txBody>
       </p:sp>
@@ -11150,7 +11184,7 @@
               <a:buNone/>
             </a:pPr>
             <a:r>
-              <a:rPr lang="en-US" sz="1222" dirty="0">
+              <a:rPr lang="en-US" sz="1598" dirty="0">
                 <a:solidFill>
                   <a:srgbClr val="1B2530"/>
                 </a:solidFill>
@@ -11160,7 +11194,7 @@
               </a:rPr>
               <a:t>uint16_t</a:t>
             </a:r>
-            <a:endParaRPr lang="en-US" sz="1222" dirty="0"/>
+            <a:endParaRPr lang="en-US" sz="1598" dirty="0"/>
           </a:p>
         </p:txBody>
       </p:sp>
@@ -11189,7 +11223,7 @@
               <a:buNone/>
             </a:pPr>
             <a:r>
-              <a:rPr lang="en-US" sz="1022" dirty="0">
+              <a:rPr lang="en-US" sz="1398" dirty="0">
                 <a:solidFill>
                   <a:srgbClr val="5B6B78"/>
                 </a:solidFill>
@@ -11199,7 +11233,7 @@
               </a:rPr>
               <a:t>+20</a:t>
             </a:r>
-            <a:endParaRPr lang="en-US" sz="1022" dirty="0"/>
+            <a:endParaRPr lang="en-US" sz="1398" dirty="0"/>
           </a:p>
         </p:txBody>
       </p:sp>
@@ -11234,7 +11268,7 @@
               <a:buNone/>
             </a:pPr>
             <a:r>
-              <a:rPr lang="en-US" sz="1222" b="1" dirty="0">
+              <a:rPr lang="en-US" sz="1598" b="1" dirty="0">
                 <a:solidFill>
                   <a:srgbClr val="FFFFFF"/>
                 </a:solidFill>
@@ -11244,7 +11278,7 @@
               </a:rPr>
               <a:t>state</a:t>
             </a:r>
-            <a:endParaRPr lang="en-US" sz="1222" dirty="0"/>
+            <a:endParaRPr lang="en-US" sz="1598" dirty="0"/>
           </a:p>
         </p:txBody>
       </p:sp>
@@ -11273,7 +11307,7 @@
               <a:buNone/>
             </a:pPr>
             <a:r>
-              <a:rPr lang="en-US" sz="1022" dirty="0">
+              <a:rPr lang="en-US" sz="1398" dirty="0">
                 <a:solidFill>
                   <a:srgbClr val="5B6B78"/>
                 </a:solidFill>
@@ -11283,7 +11317,7 @@
               </a:rPr>
               <a:t>2 bytes</a:t>
             </a:r>
-            <a:endParaRPr lang="en-US" sz="1022" dirty="0"/>
+            <a:endParaRPr lang="en-US" sz="1398" dirty="0"/>
           </a:p>
         </p:txBody>
       </p:sp>
@@ -11312,7 +11346,7 @@
               <a:buNone/>
             </a:pPr>
             <a:r>
-              <a:rPr lang="en-US" sz="1222" dirty="0">
+              <a:rPr lang="en-US" sz="1598" dirty="0">
                 <a:solidFill>
                   <a:srgbClr val="1B2530"/>
                 </a:solidFill>
@@ -11322,7 +11356,7 @@
               </a:rPr>
               <a:t>uint16_t: flags set by the physics step</a:t>
             </a:r>
-            <a:endParaRPr lang="en-US" sz="1222" dirty="0"/>
+            <a:endParaRPr lang="en-US" sz="1598" dirty="0"/>
           </a:p>
         </p:txBody>
       </p:sp>
@@ -11351,7 +11385,7 @@
               <a:buNone/>
             </a:pPr>
             <a:r>
-              <a:rPr lang="en-US" sz="1022" dirty="0">
+              <a:rPr lang="en-US" sz="1398" dirty="0">
                 <a:solidFill>
                   <a:srgbClr val="5B6B78"/>
                 </a:solidFill>
@@ -11361,7 +11395,7 @@
               </a:rPr>
               <a:t>+22</a:t>
             </a:r>
-            <a:endParaRPr lang="en-US" sz="1022" dirty="0"/>
+            <a:endParaRPr lang="en-US" sz="1398" dirty="0"/>
           </a:p>
         </p:txBody>
       </p:sp>
@@ -11396,7 +11430,7 @@
               <a:buNone/>
             </a:pPr>
             <a:r>
-              <a:rPr lang="en-US" sz="1222" b="1" dirty="0">
+              <a:rPr lang="en-US" sz="1598" b="1" dirty="0">
                 <a:solidFill>
                   <a:srgbClr val="FFFFFF"/>
                 </a:solidFill>
@@ -11406,7 +11440,7 @@
               </a:rPr>
               <a:t>layer, reserved</a:t>
             </a:r>
-            <a:endParaRPr lang="en-US" sz="1222" dirty="0"/>
+            <a:endParaRPr lang="en-US" sz="1598" dirty="0"/>
           </a:p>
         </p:txBody>
       </p:sp>
@@ -11435,7 +11469,7 @@
               <a:buNone/>
             </a:pPr>
             <a:r>
-              <a:rPr lang="en-US" sz="1022" dirty="0">
+              <a:rPr lang="en-US" sz="1398" dirty="0">
                 <a:solidFill>
                   <a:srgbClr val="5B6B78"/>
                 </a:solidFill>
@@ -11445,7 +11479,7 @@
               </a:rPr>
               <a:t>2 bytes</a:t>
             </a:r>
-            <a:endParaRPr lang="en-US" sz="1022" dirty="0"/>
+            <a:endParaRPr lang="en-US" sz="1398" dirty="0"/>
           </a:p>
         </p:txBody>
       </p:sp>
@@ -11474,7 +11508,7 @@
               <a:buNone/>
             </a:pPr>
             <a:r>
-              <a:rPr lang="en-US" sz="1222" dirty="0">
+              <a:rPr lang="en-US" sz="1598" dirty="0">
                 <a:solidFill>
                   <a:srgbClr val="1B2530"/>
                 </a:solidFill>
@@ -11484,7 +11518,7 @@
               </a:rPr>
               <a:t>two uint8_t</a:t>
             </a:r>
-            <a:endParaRPr lang="en-US" sz="1222" dirty="0"/>
+            <a:endParaRPr lang="en-US" sz="1598" dirty="0"/>
           </a:p>
         </p:txBody>
       </p:sp>
@@ -11720,7 +11754,7 @@
               <a:buNone/>
             </a:pPr>
             <a:r>
-              <a:rPr lang="en-US" sz="1000" dirty="0">
+              <a:rPr lang="en-US" sz="1250" dirty="0">
                 <a:solidFill>
                   <a:srgbClr val="E6EDF2"/>
                 </a:solidFill>
@@ -11730,14 +11764,14 @@
               </a:rPr>
               <a:t>    if (state &amp; PRG32_PLATFORM_HAZARD) {</a:t>
             </a:r>
-            <a:endParaRPr lang="en-US" sz="1000" dirty="0"/>
+            <a:endParaRPr lang="en-US" sz="1250" dirty="0"/>
           </a:p>
           <a:p>
             <a:pPr indent="0" marL="0">
               <a:buNone/>
             </a:pPr>
             <a:r>
-              <a:rPr lang="en-US" sz="1000" dirty="0">
+              <a:rPr lang="en-US" sz="1250" dirty="0">
                 <a:solidFill>
                   <a:srgbClr val="E6EDF2"/>
                 </a:solidFill>
@@ -11747,14 +11781,14 @@
               </a:rPr>
               <a:t>        prg32_audio_note(0, 0, 48, 255, 80);</a:t>
             </a:r>
-            <a:endParaRPr lang="en-US" sz="1000" dirty="0"/>
+            <a:endParaRPr lang="en-US" sz="1250" dirty="0"/>
           </a:p>
           <a:p>
             <a:pPr indent="0" marL="0">
               <a:buNone/>
             </a:pPr>
             <a:r>
-              <a:rPr lang="en-US" sz="1000" dirty="0">
+              <a:rPr lang="en-US" sz="1250" dirty="0">
                 <a:solidFill>
                   <a:srgbClr val="E6EDF2"/>
                 </a:solidFill>
@@ -11768,7 +11802,7 @@
               <a:buNone/>
             </a:pPr>
             <a:r>
-              <a:rPr lang="en-US" sz="1000" dirty="0">
+              <a:rPr lang="en-US" sz="1250" dirty="0">
                 <a:solidFill>
                   <a:srgbClr val="8FB3A0"/>
                 </a:solidFill>
@@ -11776,16 +11810,16 @@
                 <a:ea typeface="Courier New" pitchFamily="34" charset="-122"/>
                 <a:cs typeface="Courier New" pitchFamily="34" charset="-120"/>
               </a:rPr>
-              <a:t>/* back to start */</a:t>
-            </a:r>
-            <a:endParaRPr lang="en-US" sz="1000" dirty="0"/>
+              <a:t>/*</a:t>
+            </a:r>
+            <a:endParaRPr lang="en-US" sz="1250" dirty="0"/>
           </a:p>
           <a:p>
             <a:pPr indent="0" marL="0">
               <a:buNone/>
             </a:pPr>
             <a:r>
-              <a:rPr lang="en-US" sz="1000" dirty="0">
+              <a:rPr lang="en-US" sz="1250" dirty="0">
                 <a:solidFill>
                   <a:srgbClr val="E6EDF2"/>
                 </a:solidFill>
@@ -11793,9 +11827,26 @@
                 <a:ea typeface="Courier New" pitchFamily="34" charset="-122"/>
                 <a:cs typeface="Courier New" pitchFamily="34" charset="-120"/>
               </a:rPr>
+              <a:t>            back to start */</a:t>
+            </a:r>
+            <a:endParaRPr lang="en-US" sz="1250" dirty="0"/>
+          </a:p>
+          <a:p>
+            <a:pPr indent="0" marL="0">
+              <a:buNone/>
+            </a:pPr>
+            <a:r>
+              <a:rPr lang="en-US" sz="1250" dirty="0">
+                <a:solidFill>
+                  <a:srgbClr val="E6EDF2"/>
+                </a:solidFill>
+                <a:latin typeface="Courier New" pitchFamily="34" charset="0"/>
+                <a:ea typeface="Courier New" pitchFamily="34" charset="-122"/>
+                <a:cs typeface="Courier New" pitchFamily="34" charset="-120"/>
+              </a:rPr>
               <a:t>    }</a:t>
             </a:r>
-            <a:endParaRPr lang="en-US" sz="1000" dirty="0"/>
+            <a:endParaRPr lang="en-US" sz="1250" dirty="0"/>
           </a:p>
         </p:txBody>
       </p:sp>
@@ -16571,7 +16622,7 @@
               <a:buNone/>
             </a:pPr>
             <a:r>
-              <a:rPr lang="en-US" sz="1200" dirty="0">
+              <a:rPr lang="en-US" sz="1300" dirty="0">
                 <a:solidFill>
                   <a:srgbClr val="E6EDF2"/>
                 </a:solidFill>
@@ -16581,14 +16632,14 @@
               </a:rPr>
               <a:t>void bricks_c_draw(void) {</a:t>
             </a:r>
-            <a:endParaRPr lang="en-US" sz="1200" dirty="0"/>
+            <a:endParaRPr lang="en-US" sz="1300" dirty="0"/>
           </a:p>
           <a:p>
             <a:pPr indent="0" marL="0">
               <a:buNone/>
             </a:pPr>
             <a:r>
-              <a:rPr lang="en-US" sz="1200" dirty="0">
+              <a:rPr lang="en-US" sz="1300" dirty="0">
                 <a:solidFill>
                   <a:srgbClr val="E6EDF2"/>
                 </a:solidFill>
@@ -16598,14 +16649,14 @@
               </a:rPr>
               <a:t>    prg32_gfx_clear(PRG32_COLOR_BLACK);</a:t>
             </a:r>
-            <a:endParaRPr lang="en-US" sz="1200" dirty="0"/>
+            <a:endParaRPr lang="en-US" sz="1300" dirty="0"/>
           </a:p>
           <a:p>
             <a:pPr indent="0" marL="0">
               <a:buNone/>
             </a:pPr>
             <a:r>
-              <a:rPr lang="en-US" sz="1200" dirty="0">
+              <a:rPr lang="en-US" sz="1300" dirty="0">
                 <a:solidFill>
                   <a:srgbClr val="E6EDF2"/>
                 </a:solidFill>
@@ -16615,14 +16666,14 @@
               </a:rPr>
               <a:t>    for (int i = 0; i &lt; BRICKS; ++i) {</a:t>
             </a:r>
-            <a:endParaRPr lang="en-US" sz="1200" dirty="0"/>
+            <a:endParaRPr lang="en-US" sz="1300" dirty="0"/>
           </a:p>
           <a:p>
             <a:pPr indent="0" marL="0">
               <a:buNone/>
             </a:pPr>
             <a:r>
-              <a:rPr lang="en-US" sz="1200" dirty="0">
+              <a:rPr lang="en-US" sz="1300" dirty="0">
                 <a:solidFill>
                   <a:srgbClr val="E6EDF2"/>
                 </a:solidFill>
@@ -16632,14 +16683,14 @@
               </a:rPr>
               <a:t>        if (bricks[i]) {</a:t>
             </a:r>
-            <a:endParaRPr lang="en-US" sz="1200" dirty="0"/>
+            <a:endParaRPr lang="en-US" sz="1300" dirty="0"/>
           </a:p>
           <a:p>
             <a:pPr indent="0" marL="0">
               <a:buNone/>
             </a:pPr>
             <a:r>
-              <a:rPr lang="en-US" sz="1200" dirty="0">
+              <a:rPr lang="en-US" sz="1300" dirty="0">
                 <a:solidFill>
                   <a:srgbClr val="E6EDF2"/>
                 </a:solidFill>
@@ -16647,16 +16698,16 @@
                 <a:ea typeface="Courier New" pitchFamily="34" charset="-122"/>
                 <a:cs typeface="Courier New" pitchFamily="34" charset="-120"/>
               </a:rPr>
-              <a:t>            prg32_gfx_rect(i * 32 + 2, 24, 28, 8, PRG32_COLOR_CYAN);</a:t>
-            </a:r>
-            <a:endParaRPr lang="en-US" sz="1200" dirty="0"/>
+              <a:t>            prg32_gfx_rect(i * 32 + 2, 24, 28, 8,</a:t>
+            </a:r>
+            <a:endParaRPr lang="en-US" sz="1300" dirty="0"/>
           </a:p>
           <a:p>
             <a:pPr indent="0" marL="0">
               <a:buNone/>
             </a:pPr>
             <a:r>
-              <a:rPr lang="en-US" sz="1200" dirty="0">
+              <a:rPr lang="en-US" sz="1300" dirty="0">
                 <a:solidFill>
                   <a:srgbClr val="E6EDF2"/>
                 </a:solidFill>
@@ -16664,16 +16715,16 @@
                 <a:ea typeface="Courier New" pitchFamily="34" charset="-122"/>
                 <a:cs typeface="Courier New" pitchFamily="34" charset="-120"/>
               </a:rPr>
-              <a:t>        }</a:t>
-            </a:r>
-            <a:endParaRPr lang="en-US" sz="1200" dirty="0"/>
+              <a:t>                PRG32_COLOR_CYAN);</a:t>
+            </a:r>
+            <a:endParaRPr lang="en-US" sz="1300" dirty="0"/>
           </a:p>
           <a:p>
             <a:pPr indent="0" marL="0">
               <a:buNone/>
             </a:pPr>
             <a:r>
-              <a:rPr lang="en-US" sz="1200" dirty="0">
+              <a:rPr lang="en-US" sz="1300" dirty="0">
                 <a:solidFill>
                   <a:srgbClr val="E6EDF2"/>
                 </a:solidFill>
@@ -16681,16 +16732,16 @@
                 <a:ea typeface="Courier New" pitchFamily="34" charset="-122"/>
                 <a:cs typeface="Courier New" pitchFamily="34" charset="-120"/>
               </a:rPr>
-              <a:t>    }</a:t>
-            </a:r>
-            <a:endParaRPr lang="en-US" sz="1200" dirty="0"/>
+              <a:t>        }</a:t>
+            </a:r>
+            <a:endParaRPr lang="en-US" sz="1300" dirty="0"/>
           </a:p>
           <a:p>
             <a:pPr indent="0" marL="0">
               <a:buNone/>
             </a:pPr>
             <a:r>
-              <a:rPr lang="en-US" sz="1200" dirty="0">
+              <a:rPr lang="en-US" sz="1300" dirty="0">
                 <a:solidFill>
                   <a:srgbClr val="E6EDF2"/>
                 </a:solidFill>
@@ -16698,16 +16749,16 @@
                 <a:ea typeface="Courier New" pitchFamily="34" charset="-122"/>
                 <a:cs typeface="Courier New" pitchFamily="34" charset="-120"/>
               </a:rPr>
-              <a:t>    prg32_gfx_rect(paddle_x, 188, 64, 8, PRG32_COLOR_WHITE);</a:t>
-            </a:r>
-            <a:endParaRPr lang="en-US" sz="1200" dirty="0"/>
+              <a:t>    }</a:t>
+            </a:r>
+            <a:endParaRPr lang="en-US" sz="1300" dirty="0"/>
           </a:p>
           <a:p>
             <a:pPr indent="0" marL="0">
               <a:buNone/>
             </a:pPr>
             <a:r>
-              <a:rPr lang="en-US" sz="1200" dirty="0">
+              <a:rPr lang="en-US" sz="1300" dirty="0">
                 <a:solidFill>
                   <a:srgbClr val="E6EDF2"/>
                 </a:solidFill>
@@ -16715,16 +16766,16 @@
                 <a:ea typeface="Courier New" pitchFamily="34" charset="-122"/>
                 <a:cs typeface="Courier New" pitchFamily="34" charset="-120"/>
               </a:rPr>
-              <a:t>    prg32_gfx_rect(ball_x, ball_y, 8, 8, PRG32_COLOR_YELLOW);</a:t>
-            </a:r>
-            <a:endParaRPr lang="en-US" sz="1200" dirty="0"/>
+              <a:t>    prg32_gfx_rect(paddle_x, 188, 64, 8, PRG32_COLOR_WHITE);</a:t>
+            </a:r>
+            <a:endParaRPr lang="en-US" sz="1300" dirty="0"/>
           </a:p>
           <a:p>
             <a:pPr indent="0" marL="0">
               <a:buNone/>
             </a:pPr>
             <a:r>
-              <a:rPr lang="en-US" sz="1200" dirty="0">
+              <a:rPr lang="en-US" sz="1300" dirty="0">
                 <a:solidFill>
                   <a:srgbClr val="E6EDF2"/>
                 </a:solidFill>
@@ -16732,9 +16783,26 @@
                 <a:ea typeface="Courier New" pitchFamily="34" charset="-122"/>
                 <a:cs typeface="Courier New" pitchFamily="34" charset="-120"/>
               </a:rPr>
+              <a:t>    prg32_gfx_rect(ball_x, ball_y, 8, 8, PRG32_COLOR_YELLOW);</a:t>
+            </a:r>
+            <a:endParaRPr lang="en-US" sz="1300" dirty="0"/>
+          </a:p>
+          <a:p>
+            <a:pPr indent="0" marL="0">
+              <a:buNone/>
+            </a:pPr>
+            <a:r>
+              <a:rPr lang="en-US" sz="1300" dirty="0">
+                <a:solidFill>
+                  <a:srgbClr val="E6EDF2"/>
+                </a:solidFill>
+                <a:latin typeface="Courier New" pitchFamily="34" charset="0"/>
+                <a:ea typeface="Courier New" pitchFamily="34" charset="-122"/>
+                <a:cs typeface="Courier New" pitchFamily="34" charset="-120"/>
+              </a:rPr>
               <a:t>}</a:t>
             </a:r>
-            <a:endParaRPr lang="en-US" sz="1200" dirty="0"/>
+            <a:endParaRPr lang="en-US" sz="1300" dirty="0"/>
           </a:p>
         </p:txBody>
       </p:sp>
@@ -18343,7 +18411,7 @@
               <a:buNone/>
             </a:pPr>
             <a:r>
-              <a:rPr lang="en-US" sz="1100" dirty="0">
+              <a:rPr lang="en-US" sz="1250" dirty="0">
                 <a:solidFill>
                   <a:srgbClr val="E6EDF2"/>
                 </a:solidFill>
@@ -18351,16 +18419,16 @@
                 <a:ea typeface="Courier New" pitchFamily="34" charset="-122"/>
                 <a:cs typeface="Courier New" pitchFamily="34" charset="-120"/>
               </a:rPr>
-              <a:t>    if (prg32_sprite_hitbox(ball_x, ball_y, 8, 8, paddle_x, 188, 64, 8)) {</a:t>
-            </a:r>
-            <a:endParaRPr lang="en-US" sz="1100" dirty="0"/>
+              <a:t>    if (prg32_sprite_hitbox(ball_x, ball_y, 8, 8, paddle_x, 188,</a:t>
+            </a:r>
+            <a:endParaRPr lang="en-US" sz="1250" dirty="0"/>
           </a:p>
           <a:p>
             <a:pPr indent="0" marL="0">
               <a:buNone/>
             </a:pPr>
             <a:r>
-              <a:rPr lang="en-US" sz="1100" dirty="0">
+              <a:rPr lang="en-US" sz="1250" dirty="0">
                 <a:solidFill>
                   <a:srgbClr val="E6EDF2"/>
                 </a:solidFill>
@@ -18368,16 +18436,16 @@
                 <a:ea typeface="Courier New" pitchFamily="34" charset="-122"/>
                 <a:cs typeface="Courier New" pitchFamily="34" charset="-120"/>
               </a:rPr>
-              <a:t>        ball_dy = -2;</a:t>
-            </a:r>
-            <a:endParaRPr lang="en-US" sz="1100" dirty="0"/>
+              <a:t>        64, 8)) {</a:t>
+            </a:r>
+            <a:endParaRPr lang="en-US" sz="1250" dirty="0"/>
           </a:p>
           <a:p>
             <a:pPr indent="0" marL="0">
               <a:buNone/>
             </a:pPr>
             <a:r>
-              <a:rPr lang="en-US" sz="1100" dirty="0">
+              <a:rPr lang="en-US" sz="1250" dirty="0">
                 <a:solidFill>
                   <a:srgbClr val="E6EDF2"/>
                 </a:solidFill>
@@ -18385,16 +18453,16 @@
                 <a:ea typeface="Courier New" pitchFamily="34" charset="-122"/>
                 <a:cs typeface="Courier New" pitchFamily="34" charset="-120"/>
               </a:rPr>
-              <a:t>    }</a:t>
-            </a:r>
-            <a:endParaRPr lang="en-US" sz="1100" dirty="0"/>
+              <a:t>        ball_dy = -2;</a:t>
+            </a:r>
+            <a:endParaRPr lang="en-US" sz="1250" dirty="0"/>
           </a:p>
           <a:p>
             <a:pPr indent="0" marL="0">
               <a:buNone/>
             </a:pPr>
             <a:r>
-              <a:rPr lang="en-US" sz="1100" dirty="0">
+              <a:rPr lang="en-US" sz="1250" dirty="0">
                 <a:solidFill>
                   <a:srgbClr val="E6EDF2"/>
                 </a:solidFill>
@@ -18402,16 +18470,16 @@
                 <a:ea typeface="Courier New" pitchFamily="34" charset="-122"/>
                 <a:cs typeface="Courier New" pitchFamily="34" charset="-120"/>
               </a:rPr>
-              <a:t> </a:t>
-            </a:r>
-            <a:endParaRPr lang="en-US" sz="1100" dirty="0"/>
+              <a:t>    }</a:t>
+            </a:r>
+            <a:endParaRPr lang="en-US" sz="1250" dirty="0"/>
           </a:p>
           <a:p>
             <a:pPr indent="0" marL="0">
               <a:buNone/>
             </a:pPr>
             <a:r>
-              <a:rPr lang="en-US" sz="1100" dirty="0">
+              <a:rPr lang="en-US" sz="1250" dirty="0">
                 <a:solidFill>
                   <a:srgbClr val="E6EDF2"/>
                 </a:solidFill>
@@ -18419,16 +18487,16 @@
                 <a:ea typeface="Courier New" pitchFamily="34" charset="-122"/>
                 <a:cs typeface="Courier New" pitchFamily="34" charset="-120"/>
               </a:rPr>
-              <a:t>    for (int i = 0; i &lt; BRICKS; ++i) {</a:t>
-            </a:r>
-            <a:endParaRPr lang="en-US" sz="1100" dirty="0"/>
+              <a:t> </a:t>
+            </a:r>
+            <a:endParaRPr lang="en-US" sz="1250" dirty="0"/>
           </a:p>
           <a:p>
             <a:pPr indent="0" marL="0">
               <a:buNone/>
             </a:pPr>
             <a:r>
-              <a:rPr lang="en-US" sz="1100" dirty="0">
+              <a:rPr lang="en-US" sz="1250" dirty="0">
                 <a:solidFill>
                   <a:srgbClr val="E6EDF2"/>
                 </a:solidFill>
@@ -18436,16 +18504,16 @@
                 <a:ea typeface="Courier New" pitchFamily="34" charset="-122"/>
                 <a:cs typeface="Courier New" pitchFamily="34" charset="-120"/>
               </a:rPr>
-              <a:t>        if (bricks[i] &amp;&amp; prg32_sprite_hitbox(ball_x, ball_y, 8, 8,</a:t>
-            </a:r>
-            <a:endParaRPr lang="en-US" sz="1100" dirty="0"/>
+              <a:t>    for (int i = 0; i &lt; BRICKS; ++i) {</a:t>
+            </a:r>
+            <a:endParaRPr lang="en-US" sz="1250" dirty="0"/>
           </a:p>
           <a:p>
             <a:pPr indent="0" marL="0">
               <a:buNone/>
             </a:pPr>
             <a:r>
-              <a:rPr lang="en-US" sz="1100" dirty="0">
+              <a:rPr lang="en-US" sz="1250" dirty="0">
                 <a:solidFill>
                   <a:srgbClr val="E6EDF2"/>
                 </a:solidFill>
@@ -18453,16 +18521,16 @@
                 <a:ea typeface="Courier New" pitchFamily="34" charset="-122"/>
                 <a:cs typeface="Courier New" pitchFamily="34" charset="-120"/>
               </a:rPr>
-              <a:t>                                             i * 32 + 2, 24, 28, 8)) {</a:t>
-            </a:r>
-            <a:endParaRPr lang="en-US" sz="1100" dirty="0"/>
+              <a:t>        if (bricks[i] &amp;&amp; prg32_sprite_hitbox(ball_x, ball_y, 8,</a:t>
+            </a:r>
+            <a:endParaRPr lang="en-US" sz="1250" dirty="0"/>
           </a:p>
           <a:p>
             <a:pPr indent="0" marL="0">
               <a:buNone/>
             </a:pPr>
             <a:r>
-              <a:rPr lang="en-US" sz="1100" dirty="0">
+              <a:rPr lang="en-US" sz="1250" dirty="0">
                 <a:solidFill>
                   <a:srgbClr val="E6EDF2"/>
                 </a:solidFill>
@@ -18470,16 +18538,16 @@
                 <a:ea typeface="Courier New" pitchFamily="34" charset="-122"/>
                 <a:cs typeface="Courier New" pitchFamily="34" charset="-120"/>
               </a:rPr>
-              <a:t>            bricks[i] = 0;</a:t>
-            </a:r>
-            <a:endParaRPr lang="en-US" sz="1100" dirty="0"/>
+              <a:t>            8,</a:t>
+            </a:r>
+            <a:endParaRPr lang="en-US" sz="1250" dirty="0"/>
           </a:p>
           <a:p>
             <a:pPr indent="0" marL="0">
               <a:buNone/>
             </a:pPr>
             <a:r>
-              <a:rPr lang="en-US" sz="1100" dirty="0">
+              <a:rPr lang="en-US" sz="1250" dirty="0">
                 <a:solidFill>
                   <a:srgbClr val="E6EDF2"/>
                 </a:solidFill>
@@ -18487,30 +18555,33 @@
                 <a:ea typeface="Courier New" pitchFamily="34" charset="-122"/>
                 <a:cs typeface="Courier New" pitchFamily="34" charset="-120"/>
               </a:rPr>
-              <a:t>            ball_dy = 2;  </a:t>
-            </a:r>
+              <a:t>                                             i * 32 + 2, 24, 28,</a:t>
+            </a:r>
+            <a:endParaRPr lang="en-US" sz="1250" dirty="0"/>
+          </a:p>
+          <a:p>
             <a:pPr indent="0" marL="0">
               <a:buNone/>
             </a:pPr>
             <a:r>
-              <a:rPr lang="en-US" sz="1100" dirty="0">
-                <a:solidFill>
-                  <a:srgbClr val="8FB3A0"/>
+              <a:rPr lang="en-US" sz="1250" dirty="0">
+                <a:solidFill>
+                  <a:srgbClr val="E6EDF2"/>
                 </a:solidFill>
                 <a:latin typeface="Courier New" pitchFamily="34" charset="0"/>
                 <a:ea typeface="Courier New" pitchFamily="34" charset="-122"/>
                 <a:cs typeface="Courier New" pitchFamily="34" charset="-120"/>
               </a:rPr>
-              <a:t>/* send the ball back down */</a:t>
-            </a:r>
-            <a:endParaRPr lang="en-US" sz="1100" dirty="0"/>
+              <a:t>                                                 8)) {</a:t>
+            </a:r>
+            <a:endParaRPr lang="en-US" sz="1250" dirty="0"/>
           </a:p>
           <a:p>
             <a:pPr indent="0" marL="0">
               <a:buNone/>
             </a:pPr>
             <a:r>
-              <a:rPr lang="en-US" sz="1100" dirty="0">
+              <a:rPr lang="en-US" sz="1250" dirty="0">
                 <a:solidFill>
                   <a:srgbClr val="E6EDF2"/>
                 </a:solidFill>
@@ -18518,47 +18589,47 @@
                 <a:ea typeface="Courier New" pitchFamily="34" charset="-122"/>
                 <a:cs typeface="Courier New" pitchFamily="34" charset="-120"/>
               </a:rPr>
-              <a:t>            break;        </a:t>
-            </a:r>
+              <a:t>            bricks[i] = 0;</a:t>
+            </a:r>
+            <a:endParaRPr lang="en-US" sz="1250" dirty="0"/>
+          </a:p>
+          <a:p>
             <a:pPr indent="0" marL="0">
               <a:buNone/>
             </a:pPr>
             <a:r>
-              <a:rPr lang="en-US" sz="1100" dirty="0">
-                <a:solidFill>
-                  <a:srgbClr val="8FB3A0"/>
+              <a:rPr lang="en-US" sz="1250" dirty="0">
+                <a:solidFill>
+                  <a:srgbClr val="E6EDF2"/>
                 </a:solidFill>
                 <a:latin typeface="Courier New" pitchFamily="34" charset="0"/>
                 <a:ea typeface="Courier New" pitchFamily="34" charset="-122"/>
                 <a:cs typeface="Courier New" pitchFamily="34" charset="-120"/>
               </a:rPr>
-              <a:t>/* at most one brick per frame */</a:t>
-            </a:r>
-            <a:endParaRPr lang="en-US" sz="1100" dirty="0"/>
-          </a:p>
-          <a:p>
+              <a:t>            ball_dy = 2;  </a:t>
+            </a:r>
             <a:pPr indent="0" marL="0">
               <a:buNone/>
             </a:pPr>
             <a:r>
-              <a:rPr lang="en-US" sz="1100" dirty="0">
-                <a:solidFill>
-                  <a:srgbClr val="E6EDF2"/>
+              <a:rPr lang="en-US" sz="1250" dirty="0">
+                <a:solidFill>
+                  <a:srgbClr val="8FB3A0"/>
                 </a:solidFill>
                 <a:latin typeface="Courier New" pitchFamily="34" charset="0"/>
                 <a:ea typeface="Courier New" pitchFamily="34" charset="-122"/>
                 <a:cs typeface="Courier New" pitchFamily="34" charset="-120"/>
               </a:rPr>
-              <a:t>        }</a:t>
-            </a:r>
-            <a:endParaRPr lang="en-US" sz="1100" dirty="0"/>
+              <a:t>/* send the ball back down */</a:t>
+            </a:r>
+            <a:endParaRPr lang="en-US" sz="1250" dirty="0"/>
           </a:p>
           <a:p>
             <a:pPr indent="0" marL="0">
               <a:buNone/>
             </a:pPr>
             <a:r>
-              <a:rPr lang="en-US" sz="1100" dirty="0">
+              <a:rPr lang="en-US" sz="1250" dirty="0">
                 <a:solidFill>
                   <a:srgbClr val="E6EDF2"/>
                 </a:solidFill>
@@ -18566,26 +18637,74 @@
                 <a:ea typeface="Courier New" pitchFamily="34" charset="-122"/>
                 <a:cs typeface="Courier New" pitchFamily="34" charset="-120"/>
               </a:rPr>
-              <a:t>    }</a:t>
-            </a:r>
-            <a:endParaRPr lang="en-US" sz="1100" dirty="0"/>
-          </a:p>
-          <a:p>
+              <a:t>            break;        </a:t>
+            </a:r>
             <a:pPr indent="0" marL="0">
               <a:buNone/>
             </a:pPr>
             <a:r>
-              <a:rPr lang="en-US" sz="1100" dirty="0">
-                <a:solidFill>
-                  <a:srgbClr val="E6EDF2"/>
+              <a:rPr lang="en-US" sz="1250" dirty="0">
+                <a:solidFill>
+                  <a:srgbClr val="8FB3A0"/>
                 </a:solidFill>
                 <a:latin typeface="Courier New" pitchFamily="34" charset="0"/>
                 <a:ea typeface="Courier New" pitchFamily="34" charset="-122"/>
                 <a:cs typeface="Courier New" pitchFamily="34" charset="-120"/>
               </a:rPr>
+              <a:t>/* at most one brick per frame */</a:t>
+            </a:r>
+            <a:endParaRPr lang="en-US" sz="1250" dirty="0"/>
+          </a:p>
+          <a:p>
+            <a:pPr indent="0" marL="0">
+              <a:buNone/>
+            </a:pPr>
+            <a:r>
+              <a:rPr lang="en-US" sz="1250" dirty="0">
+                <a:solidFill>
+                  <a:srgbClr val="E6EDF2"/>
+                </a:solidFill>
+                <a:latin typeface="Courier New" pitchFamily="34" charset="0"/>
+                <a:ea typeface="Courier New" pitchFamily="34" charset="-122"/>
+                <a:cs typeface="Courier New" pitchFamily="34" charset="-120"/>
+              </a:rPr>
+              <a:t>        }</a:t>
+            </a:r>
+            <a:endParaRPr lang="en-US" sz="1250" dirty="0"/>
+          </a:p>
+          <a:p>
+            <a:pPr indent="0" marL="0">
+              <a:buNone/>
+            </a:pPr>
+            <a:r>
+              <a:rPr lang="en-US" sz="1250" dirty="0">
+                <a:solidFill>
+                  <a:srgbClr val="E6EDF2"/>
+                </a:solidFill>
+                <a:latin typeface="Courier New" pitchFamily="34" charset="0"/>
+                <a:ea typeface="Courier New" pitchFamily="34" charset="-122"/>
+                <a:cs typeface="Courier New" pitchFamily="34" charset="-120"/>
+              </a:rPr>
+              <a:t>    }</a:t>
+            </a:r>
+            <a:endParaRPr lang="en-US" sz="1250" dirty="0"/>
+          </a:p>
+          <a:p>
+            <a:pPr indent="0" marL="0">
+              <a:buNone/>
+            </a:pPr>
+            <a:r>
+              <a:rPr lang="en-US" sz="1250" dirty="0">
+                <a:solidFill>
+                  <a:srgbClr val="E6EDF2"/>
+                </a:solidFill>
+                <a:latin typeface="Courier New" pitchFamily="34" charset="0"/>
+                <a:ea typeface="Courier New" pitchFamily="34" charset="-122"/>
+                <a:cs typeface="Courier New" pitchFamily="34" charset="-120"/>
+              </a:rPr>
               <a:t>}</a:t>
             </a:r>
-            <a:endParaRPr lang="en-US" sz="1100" dirty="0"/>
+            <a:endParaRPr lang="en-US" sz="1250" dirty="0"/>
           </a:p>
         </p:txBody>
       </p:sp>
